--- a/carpentry/intake-142/PowerPoint/Day-08_2026-11-09_Week-3.pptx
+++ b/carpentry/intake-142/PowerPoint/Day-08_2026-11-09_Week-3.pptx
@@ -692,7 +692,7 @@
           <a:p/>
           <a:p>
             <a:r>
-              <a:t>Open the textbook to Chapter 4, pages 59–66. When two pieces are placed end to end, their lengths add. When plates and a washer form a stack, their thicknesses add too. The arithmetic is the same even though the drawing looks different. Why do we need a common denominator? It lets us count equal-sized parts in one total. We will practise with 4A question 14 and 4B questions 2–3, keeping the written sum and the physical meaning connected.</a:t>
+              <a:t>Open the textbook to Chapter 4, pages 91–99. When two pieces are placed end to end, their lengths add. When plates and a washer form a stack, their thicknesses add too. The arithmetic is the same even though the drawing looks different. Why do we need a common denominator? It lets us count equal-sized parts in one total. We will practise with 4A question 14 and 4B questions 2–3, keeping the written sum and the physical meaning connected.</a:t>
             </a:r>
           </a:p>
         </p:txBody>
@@ -996,7 +996,7 @@
           <a:p/>
           <a:p>
             <a:r>
-              <a:t>Figure 4.9 on page 65 places mixed-inch lengths together so we can see why addition is appropriate. Trace each segment and its label before following the overall length. Where does one piece end and the next begin? Their shared endpoint tells us the lengths are adjoining. The fractional labels may use different denominators, so the written calculation must rename them into shared units. Do not measure the projected illustration to obtain the answer; use its dimensions. The picture explains the arrangement, and the labels supply the values for the sum.</a:t>
+              <a:t>Figure 4.9 on page 98 places mixed-inch lengths together so we can see why addition is appropriate. Trace each segment and its label before following the overall length. Where does one piece end and the next begin? Their shared endpoint tells us the lengths are adjoining. The fractional labels may use different denominators, so the written calculation must rename them into shared units. Do not measure the projected illustration to obtain the answer; use its dimensions. The picture explains the arrangement, and the labels supply the values for the sum.</a:t>
             </a:r>
           </a:p>
         </p:txBody>
@@ -1072,7 +1072,7 @@
           <a:p/>
           <a:p>
             <a:r>
-              <a:t>In Example 4.9 on page 65, watch the fractional total after the numerators have been added. The key step is carrying a complete whole from that fraction into the whole-number total. Point to where the original wholes were combined, then where the extra whole appears. Why are those two contributions separate at first? One comes from the stated whole parts, and the other is formed by the added fractional pieces. Combining them produces the final mixed number. Check that the remaining numerator is smaller than its denominator; otherwise another whole still needs to be regrouped.</a:t>
+              <a:t>In Example 4.9 on page 98, watch the fractional total after the numerators have been added. The key step is carrying a complete whole from that fraction into the whole-number total. Point to where the original wholes were combined, then where the extra whole appears. Why are those two contributions separate at first? One comes from the stated whole parts, and the other is formed by the added fractional pieces. Combining them produces the final mixed number. Check that the remaining numerator is smaller than its denominator; otherwise another whole still needs to be regrouped.</a:t>
             </a:r>
           </a:p>
         </p:txBody>
@@ -2154,7 +2154,7 @@
           <a:p/>
           <a:p>
             <a:r>
-              <a:t>Open the textbook to pages 64–66. We will find remaining and missing lengths by subtraction. If a stock length contains a known piece and a remainder, subtracting the known piece finds the remainder. How can we check that result? Add the remainder back to the known piece and recover the overall length. We will use 4A question 15 and the drawings in 4C questions 1–3 to connect that relationship with mixed-number subtraction and regrouping.</a:t>
+              <a:t>Open the textbook to pages 97–99. We will find remaining and missing lengths by subtraction. If a stock length contains a known piece and a remainder, subtracting the known piece finds the remainder. How can we check that result? Add the remainder back to the known piece and recover the overall length. We will use 4A question 15 and the drawings in 4C questions 1–3 to connect that relationship with mixed-number subtraction and regrouping.</a:t>
             </a:r>
           </a:p>
         </p:txBody>
@@ -2458,7 +2458,7 @@
           <a:p/>
           <a:p>
             <a:r>
-              <a:t>Example 4.10 on page 66 uses stock and an offcut to give subtraction a physical meaning. Point to the original length, then the known piece, then the remaining portion. Which dimension is the starting amount in the subtraction? The overall stock length. Follow where one whole inch is renamed into fractional pieces in the written working. The length is conserved during that exchange, just expressed differently. If the drawing's leftover portion looked larger after regrouping, we would know the representation was misleading: regrouping changes the notation, not the actual amount of material.</a:t>
+              <a:t>Example 4.10 on page 99 uses stock and an offcut to give subtraction a physical meaning. Point to the original length, then the known piece, then the remaining portion. Which dimension is the starting amount in the subtraction? The overall stock length. Follow where one whole inch is renamed into fractional pieces in the written working. The length is conserved during that exchange, just expressed differently. If the drawing's leftover portion looked larger after regrouping, we would know the representation was misleading: regrouping changes the notation, not the actual amount of material.</a:t>
             </a:r>
           </a:p>
         </p:txBody>
@@ -2534,7 +2534,7 @@
           <a:p/>
           <a:p>
             <a:r>
-              <a:t>Look at the check on page 66. We add the remaining piece back to the piece removed, and the result should reconstruct the original stock length. Why is this stronger than repeating the same subtraction? Addition uses the inverse relationship and can expose a subtraction error we might otherwise repeat. Keep the units with the lengths and align the fractional denominators during the check. If the reconstructed total is short by exactly one inch, inspect whether a regrouped whole was omitted or counted twice in the original subtraction.</a:t>
+              <a:t>Look at the check on page 99. We add the remaining piece back to the piece removed, and the result should reconstruct the original stock length. Why is this stronger than repeating the same subtraction? Addition uses the inverse relationship and can expose a subtraction error we might otherwise repeat. Keep the units with the lengths and align the fractional denominators during the check. If the reconstructed total is short by exactly one inch, inspect whether a regrouped whole was omitted or counted twice in the original subtraction.</a:t>
             </a:r>
           </a:p>
         </p:txBody>
@@ -5344,7 +5344,7 @@
                 </a:solidFill>
                 <a:latin typeface="Arial"/>
               </a:rPr>
-              <a:t>Textbook Chapter 4 pp.59–66</a:t>
+              <a:t>Textbook Chapter 4 pp.91–99</a:t>
             </a:r>
           </a:p>
         </p:txBody>
@@ -6102,7 +6102,7 @@
                 </a:solidFill>
                 <a:latin typeface="Arial"/>
               </a:rPr>
-              <a:t>Textbook Chapter 4 pp.59–66</a:t>
+              <a:t>Textbook Chapter 4 pp.91–99</a:t>
             </a:r>
           </a:p>
         </p:txBody>
@@ -6302,7 +6302,7 @@
                 </a:solidFill>
                 <a:latin typeface="Arial"/>
               </a:rPr>
-              <a:t>Resources: Exercise Book 4A Q14 (p.26); 4B Q2–3 (p.27)</a:t>
+              <a:t>Resources: Exercise Book 4A Q14 (p.36); 4B Q2–3 (p.37)</a:t>
             </a:r>
           </a:p>
         </p:txBody>
@@ -6916,7 +6916,7 @@
                 </a:solidFill>
                 <a:latin typeface="Arial"/>
               </a:rPr>
-              <a:t>Textbook Chapter 4 pp.59–66</a:t>
+              <a:t>Textbook Chapter 4 pp.91–99</a:t>
             </a:r>
           </a:p>
         </p:txBody>
@@ -7672,7 +7672,7 @@
                 </a:solidFill>
                 <a:latin typeface="Arial"/>
               </a:rPr>
-              <a:t>Textbook Chapter 4 pp.59–66</a:t>
+              <a:t>Textbook Chapter 4 pp.91–99</a:t>
             </a:r>
           </a:p>
         </p:txBody>
@@ -8406,7 +8406,7 @@
                 </a:solidFill>
                 <a:latin typeface="Arial"/>
               </a:rPr>
-              <a:t>Textbook Chapter 4 pp.59–66</a:t>
+              <a:t>Textbook Chapter 4 pp.91–99</a:t>
             </a:r>
           </a:p>
         </p:txBody>
@@ -8606,7 +8606,7 @@
                 </a:solidFill>
                 <a:latin typeface="Arial"/>
               </a:rPr>
-              <a:t>Resources: Exercise Book 4A Q14 (p.26); 4B Q2–3 (p.27)</a:t>
+              <a:t>Resources: Exercise Book 4A Q14 (p.36); 4B Q2–3 (p.37)</a:t>
             </a:r>
           </a:p>
         </p:txBody>
@@ -9220,7 +9220,7 @@
                 </a:solidFill>
                 <a:latin typeface="Arial"/>
               </a:rPr>
-              <a:t>Textbook Chapter 4 pp.59–66</a:t>
+              <a:t>Textbook Chapter 4 pp.91–99</a:t>
             </a:r>
           </a:p>
         </p:txBody>
@@ -9996,7 +9996,7 @@
                 </a:solidFill>
                 <a:latin typeface="Arial"/>
               </a:rPr>
-              <a:t>Textbook Chapter 4 pp.59–66</a:t>
+              <a:t>Textbook Chapter 4 pp.91–99</a:t>
             </a:r>
           </a:p>
         </p:txBody>
@@ -10955,7 +10955,7 @@
                 </a:solidFill>
                 <a:latin typeface="Arial"/>
               </a:rPr>
-              <a:t>Textbook Chapter 4 pp.59–66</a:t>
+              <a:t>Textbook Chapter 4 pp.91–99</a:t>
             </a:r>
           </a:p>
         </p:txBody>
@@ -11666,7 +11666,7 @@
                 </a:solidFill>
                 <a:latin typeface="Arial"/>
               </a:rPr>
-              <a:t>Textbook Chapter 4 pp.59–66</a:t>
+              <a:t>Textbook Chapter 4 pp.91–99</a:t>
             </a:r>
           </a:p>
         </p:txBody>
@@ -12377,7 +12377,7 @@
                 </a:solidFill>
                 <a:latin typeface="Arial"/>
               </a:rPr>
-              <a:t>Textbook Chapter 4 pp.59–66</a:t>
+              <a:t>Textbook Chapter 4 pp.91–99</a:t>
             </a:r>
           </a:p>
         </p:txBody>
@@ -12577,7 +12577,7 @@
                 </a:solidFill>
                 <a:latin typeface="Arial"/>
               </a:rPr>
-              <a:t>Resources: Exercise Book 4A Q14 (p.26); 4B Q2–3 (p.27)</a:t>
+              <a:t>Resources: Exercise Book 4A Q14 (p.36); 4B Q2–3 (p.37)</a:t>
             </a:r>
           </a:p>
         </p:txBody>
@@ -16543,7 +16543,7 @@
                 </a:solidFill>
                 <a:latin typeface="Arial"/>
               </a:rPr>
-              <a:t>Textbook Chapter 4 pp.59–66</a:t>
+              <a:t>Textbook Chapter 4 pp.91–99</a:t>
             </a:r>
           </a:p>
         </p:txBody>
@@ -17229,7 +17229,7 @@
                 </a:solidFill>
                 <a:latin typeface="Arial"/>
               </a:rPr>
-              <a:t>Textbook Chapter 4 pp.59–66</a:t>
+              <a:t>Textbook Chapter 4 pp.91–99</a:t>
             </a:r>
           </a:p>
         </p:txBody>
@@ -17429,7 +17429,7 @@
                 </a:solidFill>
                 <a:latin typeface="Arial"/>
               </a:rPr>
-              <a:t>Resources: Exercise Book 4A Q14 (p.26); 4B Q2–3 (p.27)</a:t>
+              <a:t>Resources: Exercise Book 4A Q14 (p.36); 4B Q2–3 (p.37)</a:t>
             </a:r>
           </a:p>
         </p:txBody>
@@ -18708,7 +18708,7 @@
                 </a:solidFill>
                 <a:latin typeface="Arial"/>
               </a:rPr>
-              <a:t>Textbook Chapter 4 pp.64–66</a:t>
+              <a:t>Textbook Chapter 4 pp.97–99</a:t>
             </a:r>
           </a:p>
         </p:txBody>
@@ -18908,7 +18908,7 @@
                 </a:solidFill>
                 <a:latin typeface="Arial"/>
               </a:rPr>
-              <a:t>Textbook Chapter 4 pp.64–66</a:t>
+              <a:t>Textbook Chapter 4 pp.97–99</a:t>
             </a:r>
           </a:p>
         </p:txBody>
@@ -18956,7 +18956,7 @@
                 </a:solidFill>
                 <a:latin typeface="Arial"/>
               </a:rPr>
-              <a:t>Exercise Book 4A Q15 (p.26); 4C Q1–3 (p.29)</a:t>
+              <a:t>Exercise Book 4A Q15 (p.36); 4C Q1–3 (p.39)</a:t>
             </a:r>
           </a:p>
         </p:txBody>
@@ -19618,7 +19618,7 @@
                 </a:solidFill>
                 <a:latin typeface="Arial"/>
               </a:rPr>
-              <a:t>Textbook Chapter 4 pp.64–66</a:t>
+              <a:t>Textbook Chapter 4 pp.97–99</a:t>
             </a:r>
           </a:p>
         </p:txBody>
@@ -19818,7 +19818,7 @@
                 </a:solidFill>
                 <a:latin typeface="Arial"/>
               </a:rPr>
-              <a:t>Resources: Exercise Book 4A Q15 (p.26); 4C Q1–3 (p.29)</a:t>
+              <a:t>Resources: Exercise Book 4A Q15 (p.36); 4C Q1–3 (p.39)</a:t>
             </a:r>
           </a:p>
         </p:txBody>
@@ -20567,7 +20567,7 @@
                 </a:solidFill>
                 <a:latin typeface="Arial"/>
               </a:rPr>
-              <a:t>Textbook Chapter 4 pp.64–66</a:t>
+              <a:t>Textbook Chapter 4 pp.97–99</a:t>
             </a:r>
           </a:p>
         </p:txBody>
@@ -21812,7 +21812,7 @@
                 </a:solidFill>
                 <a:latin typeface="Arial"/>
               </a:rPr>
-              <a:t>Textbook Chapter 4 pp.64–66</a:t>
+              <a:t>Textbook Chapter 4 pp.97–99</a:t>
             </a:r>
           </a:p>
         </p:txBody>
@@ -23699,7 +23699,7 @@
                 </a:solidFill>
                 <a:latin typeface="Arial"/>
               </a:rPr>
-              <a:t>Textbook  |  page 66</a:t>
+              <a:t>Textbook  |  page 99</a:t>
             </a:r>
           </a:p>
         </p:txBody>
@@ -23747,7 +23747,7 @@
                 </a:solidFill>
                 <a:latin typeface="Arial"/>
               </a:rPr>
-              <a:t>Textbook Chapter 4 pp.64–66</a:t>
+              <a:t>Textbook Chapter 4 pp.97–99</a:t>
             </a:r>
           </a:p>
         </p:txBody>
@@ -23819,7 +23819,7 @@
                 </a:solidFill>
                 <a:latin typeface="Arial"/>
               </a:rPr>
-              <a:t>Textbook p.66 · Example 4.10: regroup a whole inch to find an offcut.</a:t>
+              <a:t>Textbook p.99 · Example 4.10: regroup a whole inch to find an offcut.</a:t>
             </a:r>
           </a:p>
         </p:txBody>
@@ -24385,7 +24385,7 @@
                 </a:solidFill>
                 <a:latin typeface="Arial"/>
               </a:rPr>
-              <a:t>Textbook  |  page 66</a:t>
+              <a:t>Textbook  |  page 99</a:t>
             </a:r>
           </a:p>
         </p:txBody>
@@ -24433,7 +24433,7 @@
                 </a:solidFill>
                 <a:latin typeface="Arial"/>
               </a:rPr>
-              <a:t>Textbook Chapter 4 pp.64–66</a:t>
+              <a:t>Textbook Chapter 4 pp.97–99</a:t>
             </a:r>
           </a:p>
         </p:txBody>
@@ -24505,7 +24505,7 @@
                 </a:solidFill>
                 <a:latin typeface="Arial"/>
               </a:rPr>
-              <a:t>Textbook p.66 · Add the remainder back to verify the original length.</a:t>
+              <a:t>Textbook p.99 · Add the remainder back to verify the original length.</a:t>
             </a:r>
           </a:p>
         </p:txBody>
@@ -25074,7 +25074,7 @@
                 </a:solidFill>
                 <a:latin typeface="Arial"/>
               </a:rPr>
-              <a:t>Textbook Chapter 4 pp.59–66</a:t>
+              <a:t>Textbook Chapter 4 pp.91–99</a:t>
             </a:r>
           </a:p>
         </p:txBody>
@@ -25274,7 +25274,7 @@
                 </a:solidFill>
                 <a:latin typeface="Arial"/>
               </a:rPr>
-              <a:t>Textbook Chapter 4 pp.59–66</a:t>
+              <a:t>Textbook Chapter 4 pp.91–99</a:t>
             </a:r>
           </a:p>
         </p:txBody>
@@ -25322,7 +25322,7 @@
                 </a:solidFill>
                 <a:latin typeface="Arial"/>
               </a:rPr>
-              <a:t>Exercise Book 4A Q14 (p.26); 4B Q2–3 (p.27)</a:t>
+              <a:t>Exercise Book 4A Q14 (p.36); 4B Q2–3 (p.37)</a:t>
             </a:r>
           </a:p>
         </p:txBody>
@@ -25984,7 +25984,7 @@
                 </a:solidFill>
                 <a:latin typeface="Arial"/>
               </a:rPr>
-              <a:t>Textbook Chapter 4 pp.64–66</a:t>
+              <a:t>Textbook Chapter 4 pp.97–99</a:t>
             </a:r>
           </a:p>
         </p:txBody>
@@ -26742,7 +26742,7 @@
                 </a:solidFill>
                 <a:latin typeface="Arial"/>
               </a:rPr>
-              <a:t>Textbook Chapter 4 pp.64–66</a:t>
+              <a:t>Textbook Chapter 4 pp.97–99</a:t>
             </a:r>
           </a:p>
         </p:txBody>
@@ -26942,7 +26942,7 @@
                 </a:solidFill>
                 <a:latin typeface="Arial"/>
               </a:rPr>
-              <a:t>Resources: Exercise Book 4A Q15 (p.26); 4C Q1–3 (p.29)</a:t>
+              <a:t>Resources: Exercise Book 4A Q15 (p.36); 4C Q1–3 (p.39)</a:t>
             </a:r>
           </a:p>
         </p:txBody>
@@ -27556,7 +27556,7 @@
                 </a:solidFill>
                 <a:latin typeface="Arial"/>
               </a:rPr>
-              <a:t>Textbook Chapter 4 pp.64–66</a:t>
+              <a:t>Textbook Chapter 4 pp.97–99</a:t>
             </a:r>
           </a:p>
         </p:txBody>
@@ -28312,7 +28312,7 @@
                 </a:solidFill>
                 <a:latin typeface="Arial"/>
               </a:rPr>
-              <a:t>Textbook Chapter 4 pp.64–66</a:t>
+              <a:t>Textbook Chapter 4 pp.97–99</a:t>
             </a:r>
           </a:p>
         </p:txBody>
@@ -29046,7 +29046,7 @@
                 </a:solidFill>
                 <a:latin typeface="Arial"/>
               </a:rPr>
-              <a:t>Textbook Chapter 4 pp.64–66</a:t>
+              <a:t>Textbook Chapter 4 pp.97–99</a:t>
             </a:r>
           </a:p>
         </p:txBody>
@@ -29246,7 +29246,7 @@
                 </a:solidFill>
                 <a:latin typeface="Arial"/>
               </a:rPr>
-              <a:t>Resources: Exercise Book 4A Q15 (p.26); 4C Q1–3 (p.29)</a:t>
+              <a:t>Resources: Exercise Book 4A Q15 (p.36); 4C Q1–3 (p.39)</a:t>
             </a:r>
           </a:p>
         </p:txBody>
@@ -29860,7 +29860,7 @@
                 </a:solidFill>
                 <a:latin typeface="Arial"/>
               </a:rPr>
-              <a:t>Textbook Chapter 4 pp.64–66</a:t>
+              <a:t>Textbook Chapter 4 pp.97–99</a:t>
             </a:r>
           </a:p>
         </p:txBody>
@@ -30636,7 +30636,7 @@
                 </a:solidFill>
                 <a:latin typeface="Arial"/>
               </a:rPr>
-              <a:t>Textbook Chapter 4 pp.64–66</a:t>
+              <a:t>Textbook Chapter 4 pp.97–99</a:t>
             </a:r>
           </a:p>
         </p:txBody>
@@ -31595,7 +31595,7 @@
                 </a:solidFill>
                 <a:latin typeface="Arial"/>
               </a:rPr>
-              <a:t>Textbook Chapter 4 pp.64–66</a:t>
+              <a:t>Textbook Chapter 4 pp.97–99</a:t>
             </a:r>
           </a:p>
         </p:txBody>
@@ -32306,7 +32306,7 @@
                 </a:solidFill>
                 <a:latin typeface="Arial"/>
               </a:rPr>
-              <a:t>Textbook Chapter 4 pp.64–66</a:t>
+              <a:t>Textbook Chapter 4 pp.97–99</a:t>
             </a:r>
           </a:p>
         </p:txBody>
@@ -32993,7 +32993,7 @@
                 </a:solidFill>
                 <a:latin typeface="Arial"/>
               </a:rPr>
-              <a:t>Textbook Chapter 4 pp.64–66</a:t>
+              <a:t>Textbook Chapter 4 pp.97–99</a:t>
             </a:r>
           </a:p>
         </p:txBody>
@@ -33193,7 +33193,7 @@
                 </a:solidFill>
                 <a:latin typeface="Arial"/>
               </a:rPr>
-              <a:t>Resources: Exercise Book 4A Q15 (p.26); 4C Q1–3 (p.29)</a:t>
+              <a:t>Resources: Exercise Book 4A Q15 (p.36); 4C Q1–3 (p.39)</a:t>
             </a:r>
           </a:p>
         </p:txBody>
@@ -33807,7 +33807,7 @@
                 </a:solidFill>
                 <a:latin typeface="Arial"/>
               </a:rPr>
-              <a:t>Textbook Chapter 4 pp.59–66</a:t>
+              <a:t>Textbook Chapter 4 pp.91–99</a:t>
             </a:r>
           </a:p>
         </p:txBody>
@@ -34007,7 +34007,7 @@
                 </a:solidFill>
                 <a:latin typeface="Arial"/>
               </a:rPr>
-              <a:t>Resources: Exercise Book 4A Q14 (p.26); 4B Q2–3 (p.27)</a:t>
+              <a:t>Resources: Exercise Book 4A Q14 (p.36); 4B Q2–3 (p.37)</a:t>
             </a:r>
           </a:p>
         </p:txBody>
@@ -34621,7 +34621,7 @@
                 </a:solidFill>
                 <a:latin typeface="Arial"/>
               </a:rPr>
-              <a:t>Textbook Chapter 4 pp.64–66</a:t>
+              <a:t>Textbook Chapter 4 pp.97–99</a:t>
             </a:r>
           </a:p>
         </p:txBody>
@@ -35307,7 +35307,7 @@
                 </a:solidFill>
                 <a:latin typeface="Arial"/>
               </a:rPr>
-              <a:t>Textbook Chapter 4 pp.64–66</a:t>
+              <a:t>Textbook Chapter 4 pp.97–99</a:t>
             </a:r>
           </a:p>
         </p:txBody>
@@ -35994,7 +35994,7 @@
                 </a:solidFill>
                 <a:latin typeface="Arial"/>
               </a:rPr>
-              <a:t>Textbook Chapter 4 pp.64–66</a:t>
+              <a:t>Textbook Chapter 4 pp.97–99</a:t>
             </a:r>
           </a:p>
         </p:txBody>
@@ -36194,7 +36194,7 @@
                 </a:solidFill>
                 <a:latin typeface="Arial"/>
               </a:rPr>
-              <a:t>Resources: Exercise Book 4A Q15 (p.26); 4C Q1–3 (p.29)</a:t>
+              <a:t>Resources: Exercise Book 4A Q15 (p.36); 4C Q1–3 (p.39)</a:t>
             </a:r>
           </a:p>
         </p:txBody>
@@ -36943,7 +36943,7 @@
                 </a:solidFill>
                 <a:latin typeface="Arial"/>
               </a:rPr>
-              <a:t>Textbook Chapter 4 pp.59–66</a:t>
+              <a:t>Textbook Chapter 4 pp.91–99</a:t>
             </a:r>
           </a:p>
         </p:txBody>
@@ -38188,7 +38188,7 @@
                 </a:solidFill>
                 <a:latin typeface="Arial"/>
               </a:rPr>
-              <a:t>Textbook Chapter 4 pp.59–66</a:t>
+              <a:t>Textbook Chapter 4 pp.91–99</a:t>
             </a:r>
           </a:p>
         </p:txBody>
@@ -40075,7 +40075,7 @@
                 </a:solidFill>
                 <a:latin typeface="Arial"/>
               </a:rPr>
-              <a:t>Textbook  |  page 65</a:t>
+              <a:t>Textbook  |  page 98</a:t>
             </a:r>
           </a:p>
         </p:txBody>
@@ -40123,7 +40123,7 @@
                 </a:solidFill>
                 <a:latin typeface="Arial"/>
               </a:rPr>
-              <a:t>Textbook Chapter 4 pp.59–66</a:t>
+              <a:t>Textbook Chapter 4 pp.91–99</a:t>
             </a:r>
           </a:p>
         </p:txBody>
@@ -40195,7 +40195,7 @@
                 </a:solidFill>
                 <a:latin typeface="Arial"/>
               </a:rPr>
-              <a:t>Textbook p.65 · Figure 4.9: adjoining mixed-inch lengths.</a:t>
+              <a:t>Textbook p.98 · Figure 4.9: adjoining mixed-inch lengths.</a:t>
             </a:r>
           </a:p>
         </p:txBody>
@@ -40761,7 +40761,7 @@
                 </a:solidFill>
                 <a:latin typeface="Arial"/>
               </a:rPr>
-              <a:t>Textbook  |  page 65</a:t>
+              <a:t>Textbook  |  page 98</a:t>
             </a:r>
           </a:p>
         </p:txBody>
@@ -40809,7 +40809,7 @@
                 </a:solidFill>
                 <a:latin typeface="Arial"/>
               </a:rPr>
-              <a:t>Textbook Chapter 4 pp.59–66</a:t>
+              <a:t>Textbook Chapter 4 pp.91–99</a:t>
             </a:r>
           </a:p>
         </p:txBody>
@@ -40881,7 +40881,7 @@
                 </a:solidFill>
                 <a:latin typeface="Arial"/>
               </a:rPr>
-              <a:t>Textbook p.65 · Example 4.9: carry a whole from the fractional total.</a:t>
+              <a:t>Textbook p.98 · Example 4.9: carry a whole from the fractional total.</a:t>
             </a:r>
           </a:p>
         </p:txBody>

--- a/carpentry/intake-142/PowerPoint/Day-08_2026-11-09_Week-3.pptx
+++ b/carpentry/intake-142/PowerPoint/Day-08_2026-11-09_Week-3.pptx
@@ -17702,6 +17702,104 @@
           </a:p>
         </p:txBody>
       </p:sp>
+      <p:sp>
+        <p:nvSpPr>
+          <p:cNvPr id="22" name="Play quiz W03-L01"/>
+          <p:cNvSpPr txBox="1"/>
+          <p:nvPr/>
+        </p:nvSpPr>
+        <p:spPr>
+          <a:xfrm>
+            <a:off x="6355080" y="6606540"/>
+            <a:ext cx="822960" cy="210312"/>
+          </a:xfrm>
+          <a:prstGeom prst="rect">
+            <a:avLst/>
+          </a:prstGeom>
+          <a:noFill/>
+        </p:spPr>
+        <p:txBody>
+          <a:bodyPr wrap="square" lIns="0" rIns="0" tIns="0" bIns="0" anchor="t">
+            <a:normAutofit fontScale="100000" lnSpcReduction="0"/>
+          </a:bodyPr>
+          <a:lstStyle/>
+          <a:p>
+            <a:pPr>
+              <a:spcBef>
+                <a:spcPts val="0"/>
+              </a:spcBef>
+              <a:spcAft>
+                <a:spcPts val="0"/>
+              </a:spcAft>
+              <a:defRPr sz="1000" b="0">
+                <a:solidFill>
+                  <a:srgbClr val="D0002B"/>
+                </a:solidFill>
+                <a:latin typeface="Arial"/>
+              </a:defRPr>
+            </a:pPr>
+            <a:r>
+              <a:rPr sz="1000">
+                <a:solidFill>
+                  <a:srgbClr val="F7F8FC"/>
+                </a:solidFill>
+                <a:latin typeface="Arial"/>
+                <a:hlinkClick r:id="rId8"/>
+              </a:rPr>
+              <a:t>Play quiz</a:t>
+            </a:r>
+          </a:p>
+        </p:txBody>
+      </p:sp>
+      <p:sp>
+        <p:nvSpPr>
+          <p:cNvPr id="23" name="Quiz PDF W03-L01"/>
+          <p:cNvSpPr txBox="1"/>
+          <p:nvPr/>
+        </p:nvSpPr>
+        <p:spPr>
+          <a:xfrm>
+            <a:off x="7296912" y="6606540"/>
+            <a:ext cx="1005840" cy="210312"/>
+          </a:xfrm>
+          <a:prstGeom prst="rect">
+            <a:avLst/>
+          </a:prstGeom>
+          <a:noFill/>
+        </p:spPr>
+        <p:txBody>
+          <a:bodyPr wrap="square" lIns="0" rIns="0" tIns="0" bIns="0" anchor="t">
+            <a:normAutofit fontScale="100000" lnSpcReduction="0"/>
+          </a:bodyPr>
+          <a:lstStyle/>
+          <a:p>
+            <a:pPr>
+              <a:spcBef>
+                <a:spcPts val="0"/>
+              </a:spcBef>
+              <a:spcAft>
+                <a:spcPts val="0"/>
+              </a:spcAft>
+              <a:defRPr sz="1000" b="0">
+                <a:solidFill>
+                  <a:srgbClr val="D0002B"/>
+                </a:solidFill>
+                <a:latin typeface="Arial"/>
+              </a:defRPr>
+            </a:pPr>
+            <a:r>
+              <a:rPr sz="1000">
+                <a:solidFill>
+                  <a:srgbClr val="F7F8FC"/>
+                </a:solidFill>
+                <a:latin typeface="Arial"/>
+                <a:hlinkClick r:id="rId9"/>
+              </a:rPr>
+              <a:t>Quiz PDF</a:t>
+            </a:r>
+          </a:p>
+        </p:txBody>
+      </p:sp>
     </p:spTree>
   </p:cSld>
   <p:clrMapOvr>
@@ -36463,6 +36561,104 @@
                 <a:latin typeface="Arial"/>
               </a:rPr>
               <a:t>Day 08  •  2026-11-09  •  42</a:t>
+            </a:r>
+          </a:p>
+        </p:txBody>
+      </p:sp>
+      <p:sp>
+        <p:nvSpPr>
+          <p:cNvPr id="22" name="Play quiz W03-L02"/>
+          <p:cNvSpPr txBox="1"/>
+          <p:nvPr/>
+        </p:nvSpPr>
+        <p:spPr>
+          <a:xfrm>
+            <a:off x="6355080" y="6606540"/>
+            <a:ext cx="822960" cy="210312"/>
+          </a:xfrm>
+          <a:prstGeom prst="rect">
+            <a:avLst/>
+          </a:prstGeom>
+          <a:noFill/>
+        </p:spPr>
+        <p:txBody>
+          <a:bodyPr wrap="square" lIns="0" rIns="0" tIns="0" bIns="0" anchor="t">
+            <a:normAutofit fontScale="100000" lnSpcReduction="0"/>
+          </a:bodyPr>
+          <a:lstStyle/>
+          <a:p>
+            <a:pPr>
+              <a:spcBef>
+                <a:spcPts val="0"/>
+              </a:spcBef>
+              <a:spcAft>
+                <a:spcPts val="0"/>
+              </a:spcAft>
+              <a:defRPr sz="1000" b="0">
+                <a:solidFill>
+                  <a:srgbClr val="D0002B"/>
+                </a:solidFill>
+                <a:latin typeface="Arial"/>
+              </a:defRPr>
+            </a:pPr>
+            <a:r>
+              <a:rPr sz="1000">
+                <a:solidFill>
+                  <a:srgbClr val="F7F8FC"/>
+                </a:solidFill>
+                <a:latin typeface="Arial"/>
+                <a:hlinkClick r:id="rId8"/>
+              </a:rPr>
+              <a:t>Play quiz</a:t>
+            </a:r>
+          </a:p>
+        </p:txBody>
+      </p:sp>
+      <p:sp>
+        <p:nvSpPr>
+          <p:cNvPr id="23" name="Quiz PDF W03-L02"/>
+          <p:cNvSpPr txBox="1"/>
+          <p:nvPr/>
+        </p:nvSpPr>
+        <p:spPr>
+          <a:xfrm>
+            <a:off x="7296912" y="6606540"/>
+            <a:ext cx="1005840" cy="210312"/>
+          </a:xfrm>
+          <a:prstGeom prst="rect">
+            <a:avLst/>
+          </a:prstGeom>
+          <a:noFill/>
+        </p:spPr>
+        <p:txBody>
+          <a:bodyPr wrap="square" lIns="0" rIns="0" tIns="0" bIns="0" anchor="t">
+            <a:normAutofit fontScale="100000" lnSpcReduction="0"/>
+          </a:bodyPr>
+          <a:lstStyle/>
+          <a:p>
+            <a:pPr>
+              <a:spcBef>
+                <a:spcPts val="0"/>
+              </a:spcBef>
+              <a:spcAft>
+                <a:spcPts val="0"/>
+              </a:spcAft>
+              <a:defRPr sz="1000" b="0">
+                <a:solidFill>
+                  <a:srgbClr val="D0002B"/>
+                </a:solidFill>
+                <a:latin typeface="Arial"/>
+              </a:defRPr>
+            </a:pPr>
+            <a:r>
+              <a:rPr sz="1000">
+                <a:solidFill>
+                  <a:srgbClr val="F7F8FC"/>
+                </a:solidFill>
+                <a:latin typeface="Arial"/>
+                <a:hlinkClick r:id="rId9"/>
+              </a:rPr>
+              <a:t>Quiz PDF</a:t>
             </a:r>
           </a:p>
         </p:txBody>
